--- a/dist/초6/국어/읽기와비판/초6_국어_읽기와비판_01_사실과의견.pptx
+++ b/dist/초6/국어/읽기와비판/초6_국어_읽기와비판_01_사실과의견.pptx
@@ -120,13 +120,13 @@
   <p:extLst>
     <p:ext uri="{521415D9-36F7-43E2-AB2F-B90AF26B5E84}">
       <p14:sectionLst xmlns:p14="http://schemas.microsoft.com/office/powerpoint/2010/main">
-        <p14:section name="도입" id="{60333939-a08b-5f2c-adb5-95510cd030e7}">
+        <p14:section name="도입" id="{79fedf9c-f350-585d-e3d9-c17bc9bcdd5d}">
           <p14:sldIdLst>
             <p14:sldId id="256"/>
             <p14:sldId id="257"/>
           </p14:sldIdLst>
         </p14:section>
-        <p14:section name="개념" id="{9447981a-f4a6-0537-da36-a4cae2c53fc9}">
+        <p14:section name="개념" id="{7d68cb77-7d49-f9ba-8d62-b60ac8a832ac}">
           <p14:sldIdLst>
             <p14:sldId id="258"/>
             <p14:sldId id="259"/>
@@ -134,26 +134,26 @@
             <p14:sldId id="261"/>
           </p14:sldIdLst>
         </p14:section>
-        <p14:section name="연습" id="{e38bdd88-99ed-d675-0bfb-a174fa38bf4a}">
+        <p14:section name="연습" id="{f7c202f0-0edb-c5d4-3e75-8d440ea206fc}">
           <p14:sldIdLst>
             <p14:sldId id="262"/>
             <p14:sldId id="263"/>
             <p14:sldId id="264"/>
           </p14:sldIdLst>
         </p14:section>
-        <p14:section name="확인" id="{8ceea111-e29a-70c1-b1c3-7c0e1f20b717}">
+        <p14:section name="확인" id="{05f3f0e6-01ff-1d49-1959-bd3bc5fafc4b}">
           <p14:sldIdLst>
             <p14:sldId id="265"/>
             <p14:sldId id="266"/>
             <p14:sldId id="267"/>
           </p14:sldIdLst>
         </p14:section>
-        <p14:section name="정리" id="{0053e958-469a-61db-4f18-c5b4f3905816}">
+        <p14:section name="정리" id="{1e5cc33e-654d-4fa0-6213-1b41b12aa25c}">
           <p14:sldIdLst>
             <p14:sldId id="268"/>
           </p14:sldIdLst>
         </p14:section>
-        <p14:section name="보충" id="{617e5fc6-2eca-3827-b104-bc5bd9eb92ca}">
+        <p14:section name="보충" id="{42b3dfa0-7553-9233-1ee8-8faabe572485}">
           <p14:sldIdLst>
             <p14:sldId id="269"/>
           </p14:sldIdLst>
@@ -7782,7 +7782,7 @@
           </p:nvPr>
         </p:nvGraphicFramePr>
         <p:xfrm>
-          <a:off x="608076" y="2350516"/>
+          <a:off x="608076" y="1964944"/>
           <a:ext cx="10972800" cy="914400"/>
         </p:xfrm>
         <a:graphic>
@@ -7793,7 +7793,7 @@
                 <a:gridCol w="5047488"/>
                 <a:gridCol w="5925312"/>
               </a:tblGrid>
-              <a:tr h="472440">
+              <a:tr h="481584">
                 <a:tc>
                   <a:txBody>
                     <a:bodyPr/>
@@ -7931,7 +7931,7 @@
                   </a:tcPr>
                 </a:tc>
               </a:tr>
-              <a:tr h="472440">
+              <a:tr h="853440">
                 <a:tc>
                   <a:txBody>
                     <a:bodyPr/>
@@ -8090,7 +8090,7 @@
                   </a:tcPr>
                 </a:tc>
               </a:tr>
-              <a:tr h="472440">
+              <a:tr h="853440">
                 <a:tc>
                   <a:txBody>
                     <a:bodyPr/>
